--- a/平安_讚美之泉.pptx
+++ b/平安_讚美之泉.pptx
@@ -155,7 +155,7 @@
           <a:lstStyle/>
           <a:p>
             <a:r>
-              <a:rPr lang="en-US" altLang="zh-TW" smtClean="0"/>
+              <a:rPr lang="en-US" altLang="zh-TW"/>
               <a:t>Click to edit Master title style</a:t>
             </a:r>
             <a:endParaRPr lang="zh-TW" altLang="en-US"/>
@@ -274,7 +274,7 @@
           </a:lstStyle>
           <a:p>
             <a:r>
-              <a:rPr lang="en-US" altLang="zh-TW" smtClean="0"/>
+              <a:rPr lang="en-US" altLang="zh-TW"/>
               <a:t>Click to edit Master subtitle style</a:t>
             </a:r>
             <a:endParaRPr lang="zh-TW" altLang="en-US"/>
@@ -298,7 +298,7 @@
           <a:p>
             <a:fld id="{073E9F6A-5310-4AD6-A3C3-8F2A6600D488}" type="datetimeFigureOut">
               <a:rPr lang="vi-VN" smtClean="0"/>
-              <a:t>20/05/2023</a:t>
+              <a:t>04/01/2025</a:t>
             </a:fld>
             <a:endParaRPr lang="vi-VN"/>
           </a:p>
@@ -392,7 +392,7 @@
           <a:lstStyle/>
           <a:p>
             <a:r>
-              <a:rPr lang="en-US" altLang="zh-TW" smtClean="0"/>
+              <a:rPr lang="en-US" altLang="zh-TW"/>
               <a:t>Click to edit Master title style</a:t>
             </a:r>
             <a:endParaRPr lang="zh-TW" altLang="en-US"/>
@@ -416,35 +416,35 @@
           <a:p>
             <a:pPr lvl="0"/>
             <a:r>
-              <a:rPr lang="en-US" altLang="zh-TW" smtClean="0"/>
+              <a:rPr lang="en-US" altLang="zh-TW"/>
               <a:t>Edit Master text styles</a:t>
             </a:r>
           </a:p>
           <a:p>
             <a:pPr lvl="1"/>
             <a:r>
-              <a:rPr lang="en-US" altLang="zh-TW" smtClean="0"/>
+              <a:rPr lang="en-US" altLang="zh-TW"/>
               <a:t>Second level</a:t>
             </a:r>
           </a:p>
           <a:p>
             <a:pPr lvl="2"/>
             <a:r>
-              <a:rPr lang="en-US" altLang="zh-TW" smtClean="0"/>
+              <a:rPr lang="en-US" altLang="zh-TW"/>
               <a:t>Third level</a:t>
             </a:r>
           </a:p>
           <a:p>
             <a:pPr lvl="3"/>
             <a:r>
-              <a:rPr lang="en-US" altLang="zh-TW" smtClean="0"/>
+              <a:rPr lang="en-US" altLang="zh-TW"/>
               <a:t>Fourth level</a:t>
             </a:r>
           </a:p>
           <a:p>
             <a:pPr lvl="4"/>
             <a:r>
-              <a:rPr lang="en-US" altLang="zh-TW" smtClean="0"/>
+              <a:rPr lang="en-US" altLang="zh-TW"/>
               <a:t>Fifth level</a:t>
             </a:r>
             <a:endParaRPr lang="zh-TW" altLang="en-US"/>
@@ -468,7 +468,7 @@
           <a:p>
             <a:fld id="{073E9F6A-5310-4AD6-A3C3-8F2A6600D488}" type="datetimeFigureOut">
               <a:rPr lang="vi-VN" smtClean="0"/>
-              <a:t>20/05/2023</a:t>
+              <a:t>04/01/2025</a:t>
             </a:fld>
             <a:endParaRPr lang="vi-VN"/>
           </a:p>
@@ -567,7 +567,7 @@
           <a:lstStyle/>
           <a:p>
             <a:r>
-              <a:rPr lang="en-US" altLang="zh-TW" smtClean="0"/>
+              <a:rPr lang="en-US" altLang="zh-TW"/>
               <a:t>Click to edit Master title style</a:t>
             </a:r>
             <a:endParaRPr lang="zh-TW" altLang="en-US"/>
@@ -596,35 +596,35 @@
           <a:p>
             <a:pPr lvl="0"/>
             <a:r>
-              <a:rPr lang="en-US" altLang="zh-TW" smtClean="0"/>
+              <a:rPr lang="en-US" altLang="zh-TW"/>
               <a:t>Edit Master text styles</a:t>
             </a:r>
           </a:p>
           <a:p>
             <a:pPr lvl="1"/>
             <a:r>
-              <a:rPr lang="en-US" altLang="zh-TW" smtClean="0"/>
+              <a:rPr lang="en-US" altLang="zh-TW"/>
               <a:t>Second level</a:t>
             </a:r>
           </a:p>
           <a:p>
             <a:pPr lvl="2"/>
             <a:r>
-              <a:rPr lang="en-US" altLang="zh-TW" smtClean="0"/>
+              <a:rPr lang="en-US" altLang="zh-TW"/>
               <a:t>Third level</a:t>
             </a:r>
           </a:p>
           <a:p>
             <a:pPr lvl="3"/>
             <a:r>
-              <a:rPr lang="en-US" altLang="zh-TW" smtClean="0"/>
+              <a:rPr lang="en-US" altLang="zh-TW"/>
               <a:t>Fourth level</a:t>
             </a:r>
           </a:p>
           <a:p>
             <a:pPr lvl="4"/>
             <a:r>
-              <a:rPr lang="en-US" altLang="zh-TW" smtClean="0"/>
+              <a:rPr lang="en-US" altLang="zh-TW"/>
               <a:t>Fifth level</a:t>
             </a:r>
             <a:endParaRPr lang="zh-TW" altLang="en-US"/>
@@ -648,7 +648,7 @@
           <a:p>
             <a:fld id="{073E9F6A-5310-4AD6-A3C3-8F2A6600D488}" type="datetimeFigureOut">
               <a:rPr lang="vi-VN" smtClean="0"/>
-              <a:t>20/05/2023</a:t>
+              <a:t>04/01/2025</a:t>
             </a:fld>
             <a:endParaRPr lang="vi-VN"/>
           </a:p>
@@ -742,7 +742,7 @@
           <a:lstStyle/>
           <a:p>
             <a:r>
-              <a:rPr lang="en-US" altLang="zh-TW" smtClean="0"/>
+              <a:rPr lang="en-US" altLang="zh-TW"/>
               <a:t>Click to edit Master title style</a:t>
             </a:r>
             <a:endParaRPr lang="zh-TW" altLang="en-US"/>
@@ -766,35 +766,35 @@
           <a:p>
             <a:pPr lvl="0"/>
             <a:r>
-              <a:rPr lang="en-US" altLang="zh-TW" smtClean="0"/>
+              <a:rPr lang="en-US" altLang="zh-TW"/>
               <a:t>Edit Master text styles</a:t>
             </a:r>
           </a:p>
           <a:p>
             <a:pPr lvl="1"/>
             <a:r>
-              <a:rPr lang="en-US" altLang="zh-TW" smtClean="0"/>
+              <a:rPr lang="en-US" altLang="zh-TW"/>
               <a:t>Second level</a:t>
             </a:r>
           </a:p>
           <a:p>
             <a:pPr lvl="2"/>
             <a:r>
-              <a:rPr lang="en-US" altLang="zh-TW" smtClean="0"/>
+              <a:rPr lang="en-US" altLang="zh-TW"/>
               <a:t>Third level</a:t>
             </a:r>
           </a:p>
           <a:p>
             <a:pPr lvl="3"/>
             <a:r>
-              <a:rPr lang="en-US" altLang="zh-TW" smtClean="0"/>
+              <a:rPr lang="en-US" altLang="zh-TW"/>
               <a:t>Fourth level</a:t>
             </a:r>
           </a:p>
           <a:p>
             <a:pPr lvl="4"/>
             <a:r>
-              <a:rPr lang="en-US" altLang="zh-TW" smtClean="0"/>
+              <a:rPr lang="en-US" altLang="zh-TW"/>
               <a:t>Fifth level</a:t>
             </a:r>
             <a:endParaRPr lang="zh-TW" altLang="en-US"/>
@@ -818,7 +818,7 @@
           <a:p>
             <a:fld id="{073E9F6A-5310-4AD6-A3C3-8F2A6600D488}" type="datetimeFigureOut">
               <a:rPr lang="vi-VN" smtClean="0"/>
-              <a:t>20/05/2023</a:t>
+              <a:t>04/01/2025</a:t>
             </a:fld>
             <a:endParaRPr lang="vi-VN"/>
           </a:p>
@@ -921,7 +921,7 @@
           </a:lstStyle>
           <a:p>
             <a:r>
-              <a:rPr lang="en-US" altLang="zh-TW" smtClean="0"/>
+              <a:rPr lang="en-US" altLang="zh-TW"/>
               <a:t>Click to edit Master title style</a:t>
             </a:r>
             <a:endParaRPr lang="zh-TW" altLang="en-US"/>
@@ -1041,7 +1041,7 @@
           <a:p>
             <a:pPr lvl="0"/>
             <a:r>
-              <a:rPr lang="en-US" altLang="zh-TW" smtClean="0"/>
+              <a:rPr lang="en-US" altLang="zh-TW"/>
               <a:t>Edit Master text styles</a:t>
             </a:r>
           </a:p>
@@ -1064,7 +1064,7 @@
           <a:p>
             <a:fld id="{073E9F6A-5310-4AD6-A3C3-8F2A6600D488}" type="datetimeFigureOut">
               <a:rPr lang="vi-VN" smtClean="0"/>
-              <a:t>20/05/2023</a:t>
+              <a:t>04/01/2025</a:t>
             </a:fld>
             <a:endParaRPr lang="vi-VN"/>
           </a:p>
@@ -1158,7 +1158,7 @@
           <a:lstStyle/>
           <a:p>
             <a:r>
-              <a:rPr lang="en-US" altLang="zh-TW" smtClean="0"/>
+              <a:rPr lang="en-US" altLang="zh-TW"/>
               <a:t>Click to edit Master title style</a:t>
             </a:r>
             <a:endParaRPr lang="zh-TW" altLang="en-US"/>
@@ -1215,35 +1215,35 @@
           <a:p>
             <a:pPr lvl="0"/>
             <a:r>
-              <a:rPr lang="en-US" altLang="zh-TW" smtClean="0"/>
+              <a:rPr lang="en-US" altLang="zh-TW"/>
               <a:t>Edit Master text styles</a:t>
             </a:r>
           </a:p>
           <a:p>
             <a:pPr lvl="1"/>
             <a:r>
-              <a:rPr lang="en-US" altLang="zh-TW" smtClean="0"/>
+              <a:rPr lang="en-US" altLang="zh-TW"/>
               <a:t>Second level</a:t>
             </a:r>
           </a:p>
           <a:p>
             <a:pPr lvl="2"/>
             <a:r>
-              <a:rPr lang="en-US" altLang="zh-TW" smtClean="0"/>
+              <a:rPr lang="en-US" altLang="zh-TW"/>
               <a:t>Third level</a:t>
             </a:r>
           </a:p>
           <a:p>
             <a:pPr lvl="3"/>
             <a:r>
-              <a:rPr lang="en-US" altLang="zh-TW" smtClean="0"/>
+              <a:rPr lang="en-US" altLang="zh-TW"/>
               <a:t>Fourth level</a:t>
             </a:r>
           </a:p>
           <a:p>
             <a:pPr lvl="4"/>
             <a:r>
-              <a:rPr lang="en-US" altLang="zh-TW" smtClean="0"/>
+              <a:rPr lang="en-US" altLang="zh-TW"/>
               <a:t>Fifth level</a:t>
             </a:r>
             <a:endParaRPr lang="zh-TW" altLang="en-US"/>
@@ -1300,35 +1300,35 @@
           <a:p>
             <a:pPr lvl="0"/>
             <a:r>
-              <a:rPr lang="en-US" altLang="zh-TW" smtClean="0"/>
+              <a:rPr lang="en-US" altLang="zh-TW"/>
               <a:t>Edit Master text styles</a:t>
             </a:r>
           </a:p>
           <a:p>
             <a:pPr lvl="1"/>
             <a:r>
-              <a:rPr lang="en-US" altLang="zh-TW" smtClean="0"/>
+              <a:rPr lang="en-US" altLang="zh-TW"/>
               <a:t>Second level</a:t>
             </a:r>
           </a:p>
           <a:p>
             <a:pPr lvl="2"/>
             <a:r>
-              <a:rPr lang="en-US" altLang="zh-TW" smtClean="0"/>
+              <a:rPr lang="en-US" altLang="zh-TW"/>
               <a:t>Third level</a:t>
             </a:r>
           </a:p>
           <a:p>
             <a:pPr lvl="3"/>
             <a:r>
-              <a:rPr lang="en-US" altLang="zh-TW" smtClean="0"/>
+              <a:rPr lang="en-US" altLang="zh-TW"/>
               <a:t>Fourth level</a:t>
             </a:r>
           </a:p>
           <a:p>
             <a:pPr lvl="4"/>
             <a:r>
-              <a:rPr lang="en-US" altLang="zh-TW" smtClean="0"/>
+              <a:rPr lang="en-US" altLang="zh-TW"/>
               <a:t>Fifth level</a:t>
             </a:r>
             <a:endParaRPr lang="zh-TW" altLang="en-US"/>
@@ -1352,7 +1352,7 @@
           <a:p>
             <a:fld id="{073E9F6A-5310-4AD6-A3C3-8F2A6600D488}" type="datetimeFigureOut">
               <a:rPr lang="vi-VN" smtClean="0"/>
-              <a:t>20/05/2023</a:t>
+              <a:t>04/01/2025</a:t>
             </a:fld>
             <a:endParaRPr lang="vi-VN"/>
           </a:p>
@@ -1450,7 +1450,7 @@
           </a:lstStyle>
           <a:p>
             <a:r>
-              <a:rPr lang="en-US" altLang="zh-TW" smtClean="0"/>
+              <a:rPr lang="en-US" altLang="zh-TW"/>
               <a:t>Click to edit Master title style</a:t>
             </a:r>
             <a:endParaRPr lang="zh-TW" altLang="en-US"/>
@@ -1516,7 +1516,7 @@
           <a:p>
             <a:pPr lvl="0"/>
             <a:r>
-              <a:rPr lang="en-US" altLang="zh-TW" smtClean="0"/>
+              <a:rPr lang="en-US" altLang="zh-TW"/>
               <a:t>Edit Master text styles</a:t>
             </a:r>
           </a:p>
@@ -1572,35 +1572,35 @@
           <a:p>
             <a:pPr lvl="0"/>
             <a:r>
-              <a:rPr lang="en-US" altLang="zh-TW" smtClean="0"/>
+              <a:rPr lang="en-US" altLang="zh-TW"/>
               <a:t>Edit Master text styles</a:t>
             </a:r>
           </a:p>
           <a:p>
             <a:pPr lvl="1"/>
             <a:r>
-              <a:rPr lang="en-US" altLang="zh-TW" smtClean="0"/>
+              <a:rPr lang="en-US" altLang="zh-TW"/>
               <a:t>Second level</a:t>
             </a:r>
           </a:p>
           <a:p>
             <a:pPr lvl="2"/>
             <a:r>
-              <a:rPr lang="en-US" altLang="zh-TW" smtClean="0"/>
+              <a:rPr lang="en-US" altLang="zh-TW"/>
               <a:t>Third level</a:t>
             </a:r>
           </a:p>
           <a:p>
             <a:pPr lvl="3"/>
             <a:r>
-              <a:rPr lang="en-US" altLang="zh-TW" smtClean="0"/>
+              <a:rPr lang="en-US" altLang="zh-TW"/>
               <a:t>Fourth level</a:t>
             </a:r>
           </a:p>
           <a:p>
             <a:pPr lvl="4"/>
             <a:r>
-              <a:rPr lang="en-US" altLang="zh-TW" smtClean="0"/>
+              <a:rPr lang="en-US" altLang="zh-TW"/>
               <a:t>Fifth level</a:t>
             </a:r>
             <a:endParaRPr lang="zh-TW" altLang="en-US"/>
@@ -1666,7 +1666,7 @@
           <a:p>
             <a:pPr lvl="0"/>
             <a:r>
-              <a:rPr lang="en-US" altLang="zh-TW" smtClean="0"/>
+              <a:rPr lang="en-US" altLang="zh-TW"/>
               <a:t>Edit Master text styles</a:t>
             </a:r>
           </a:p>
@@ -1722,35 +1722,35 @@
           <a:p>
             <a:pPr lvl="0"/>
             <a:r>
-              <a:rPr lang="en-US" altLang="zh-TW" smtClean="0"/>
+              <a:rPr lang="en-US" altLang="zh-TW"/>
               <a:t>Edit Master text styles</a:t>
             </a:r>
           </a:p>
           <a:p>
             <a:pPr lvl="1"/>
             <a:r>
-              <a:rPr lang="en-US" altLang="zh-TW" smtClean="0"/>
+              <a:rPr lang="en-US" altLang="zh-TW"/>
               <a:t>Second level</a:t>
             </a:r>
           </a:p>
           <a:p>
             <a:pPr lvl="2"/>
             <a:r>
-              <a:rPr lang="en-US" altLang="zh-TW" smtClean="0"/>
+              <a:rPr lang="en-US" altLang="zh-TW"/>
               <a:t>Third level</a:t>
             </a:r>
           </a:p>
           <a:p>
             <a:pPr lvl="3"/>
             <a:r>
-              <a:rPr lang="en-US" altLang="zh-TW" smtClean="0"/>
+              <a:rPr lang="en-US" altLang="zh-TW"/>
               <a:t>Fourth level</a:t>
             </a:r>
           </a:p>
           <a:p>
             <a:pPr lvl="4"/>
             <a:r>
-              <a:rPr lang="en-US" altLang="zh-TW" smtClean="0"/>
+              <a:rPr lang="en-US" altLang="zh-TW"/>
               <a:t>Fifth level</a:t>
             </a:r>
             <a:endParaRPr lang="zh-TW" altLang="en-US"/>
@@ -1774,7 +1774,7 @@
           <a:p>
             <a:fld id="{073E9F6A-5310-4AD6-A3C3-8F2A6600D488}" type="datetimeFigureOut">
               <a:rPr lang="vi-VN" smtClean="0"/>
-              <a:t>20/05/2023</a:t>
+              <a:t>04/01/2025</a:t>
             </a:fld>
             <a:endParaRPr lang="vi-VN"/>
           </a:p>
@@ -1868,7 +1868,7 @@
           <a:lstStyle/>
           <a:p>
             <a:r>
-              <a:rPr lang="en-US" altLang="zh-TW" smtClean="0"/>
+              <a:rPr lang="en-US" altLang="zh-TW"/>
               <a:t>Click to edit Master title style</a:t>
             </a:r>
             <a:endParaRPr lang="zh-TW" altLang="en-US"/>
@@ -1892,7 +1892,7 @@
           <a:p>
             <a:fld id="{073E9F6A-5310-4AD6-A3C3-8F2A6600D488}" type="datetimeFigureOut">
               <a:rPr lang="vi-VN" smtClean="0"/>
-              <a:t>20/05/2023</a:t>
+              <a:t>04/01/2025</a:t>
             </a:fld>
             <a:endParaRPr lang="vi-VN"/>
           </a:p>
@@ -1987,7 +1987,7 @@
           <a:p>
             <a:fld id="{073E9F6A-5310-4AD6-A3C3-8F2A6600D488}" type="datetimeFigureOut">
               <a:rPr lang="vi-VN" smtClean="0"/>
-              <a:t>20/05/2023</a:t>
+              <a:t>04/01/2025</a:t>
             </a:fld>
             <a:endParaRPr lang="vi-VN"/>
           </a:p>
@@ -2090,7 +2090,7 @@
           </a:lstStyle>
           <a:p>
             <a:r>
-              <a:rPr lang="en-US" altLang="zh-TW" smtClean="0"/>
+              <a:rPr lang="en-US" altLang="zh-TW"/>
               <a:t>Click to edit Master title style</a:t>
             </a:r>
             <a:endParaRPr lang="zh-TW" altLang="en-US"/>
@@ -2147,35 +2147,35 @@
           <a:p>
             <a:pPr lvl="0"/>
             <a:r>
-              <a:rPr lang="en-US" altLang="zh-TW" smtClean="0"/>
+              <a:rPr lang="en-US" altLang="zh-TW"/>
               <a:t>Edit Master text styles</a:t>
             </a:r>
           </a:p>
           <a:p>
             <a:pPr lvl="1"/>
             <a:r>
-              <a:rPr lang="en-US" altLang="zh-TW" smtClean="0"/>
+              <a:rPr lang="en-US" altLang="zh-TW"/>
               <a:t>Second level</a:t>
             </a:r>
           </a:p>
           <a:p>
             <a:pPr lvl="2"/>
             <a:r>
-              <a:rPr lang="en-US" altLang="zh-TW" smtClean="0"/>
+              <a:rPr lang="en-US" altLang="zh-TW"/>
               <a:t>Third level</a:t>
             </a:r>
           </a:p>
           <a:p>
             <a:pPr lvl="3"/>
             <a:r>
-              <a:rPr lang="en-US" altLang="zh-TW" smtClean="0"/>
+              <a:rPr lang="en-US" altLang="zh-TW"/>
               <a:t>Fourth level</a:t>
             </a:r>
           </a:p>
           <a:p>
             <a:pPr lvl="4"/>
             <a:r>
-              <a:rPr lang="en-US" altLang="zh-TW" smtClean="0"/>
+              <a:rPr lang="en-US" altLang="zh-TW"/>
               <a:t>Fifth level</a:t>
             </a:r>
             <a:endParaRPr lang="zh-TW" altLang="en-US"/>
@@ -2241,7 +2241,7 @@
           <a:p>
             <a:pPr lvl="0"/>
             <a:r>
-              <a:rPr lang="en-US" altLang="zh-TW" smtClean="0"/>
+              <a:rPr lang="en-US" altLang="zh-TW"/>
               <a:t>Edit Master text styles</a:t>
             </a:r>
           </a:p>
@@ -2264,7 +2264,7 @@
           <a:p>
             <a:fld id="{073E9F6A-5310-4AD6-A3C3-8F2A6600D488}" type="datetimeFigureOut">
               <a:rPr lang="vi-VN" smtClean="0"/>
-              <a:t>20/05/2023</a:t>
+              <a:t>04/01/2025</a:t>
             </a:fld>
             <a:endParaRPr lang="vi-VN"/>
           </a:p>
@@ -2367,7 +2367,7 @@
           </a:lstStyle>
           <a:p>
             <a:r>
-              <a:rPr lang="en-US" altLang="zh-TW" smtClean="0"/>
+              <a:rPr lang="en-US" altLang="zh-TW"/>
               <a:t>Click to edit Master title style</a:t>
             </a:r>
             <a:endParaRPr lang="zh-TW" altLang="en-US"/>
@@ -2432,7 +2432,7 @@
           </a:lstStyle>
           <a:p>
             <a:r>
-              <a:rPr lang="en-US" altLang="zh-TW" smtClean="0"/>
+              <a:rPr lang="en-US" altLang="zh-TW"/>
               <a:t>Click icon to add picture</a:t>
             </a:r>
             <a:endParaRPr lang="zh-TW" altLang="en-US"/>
@@ -2498,7 +2498,7 @@
           <a:p>
             <a:pPr lvl="0"/>
             <a:r>
-              <a:rPr lang="en-US" altLang="zh-TW" smtClean="0"/>
+              <a:rPr lang="en-US" altLang="zh-TW"/>
               <a:t>Edit Master text styles</a:t>
             </a:r>
           </a:p>
@@ -2521,7 +2521,7 @@
           <a:p>
             <a:fld id="{073E9F6A-5310-4AD6-A3C3-8F2A6600D488}" type="datetimeFigureOut">
               <a:rPr lang="vi-VN" smtClean="0"/>
-              <a:t>20/05/2023</a:t>
+              <a:t>04/01/2025</a:t>
             </a:fld>
             <a:endParaRPr lang="vi-VN"/>
           </a:p>
@@ -2635,10 +2635,9 @@
           <a:lstStyle/>
           <a:p>
             <a:r>
-              <a:rPr lang="zh-TW" altLang="en-US" smtClean="0"/>
+              <a:rPr lang="zh-TW" altLang="en-US"/>
               <a:t>按一下以編輯母片標題樣式</a:t>
             </a:r>
-            <a:endParaRPr lang="zh-TW" altLang="en-US"/>
           </a:p>
         </p:txBody>
       </p:sp>
@@ -2669,38 +2668,37 @@
           <a:p>
             <a:pPr lvl="0"/>
             <a:r>
-              <a:rPr lang="zh-TW" altLang="en-US" smtClean="0"/>
+              <a:rPr lang="zh-TW" altLang="en-US"/>
               <a:t>按一下以編輯母片文字樣式</a:t>
             </a:r>
           </a:p>
           <a:p>
             <a:pPr lvl="1"/>
             <a:r>
-              <a:rPr lang="zh-TW" altLang="en-US" smtClean="0"/>
+              <a:rPr lang="zh-TW" altLang="en-US"/>
               <a:t>第二層</a:t>
             </a:r>
           </a:p>
           <a:p>
             <a:pPr lvl="2"/>
             <a:r>
-              <a:rPr lang="zh-TW" altLang="en-US" smtClean="0"/>
+              <a:rPr lang="zh-TW" altLang="en-US"/>
               <a:t>第三層</a:t>
             </a:r>
           </a:p>
           <a:p>
             <a:pPr lvl="3"/>
             <a:r>
-              <a:rPr lang="zh-TW" altLang="en-US" smtClean="0"/>
+              <a:rPr lang="zh-TW" altLang="en-US"/>
               <a:t>第四層</a:t>
             </a:r>
           </a:p>
           <a:p>
             <a:pPr lvl="4"/>
             <a:r>
-              <a:rPr lang="zh-TW" altLang="en-US" smtClean="0"/>
+              <a:rPr lang="zh-TW" altLang="en-US"/>
               <a:t>第五層</a:t>
             </a:r>
-            <a:endParaRPr lang="zh-TW" altLang="en-US"/>
           </a:p>
         </p:txBody>
       </p:sp>
@@ -2739,7 +2737,7 @@
           <a:p>
             <a:fld id="{073E9F6A-5310-4AD6-A3C3-8F2A6600D488}" type="datetimeFigureOut">
               <a:rPr lang="vi-VN" smtClean="0"/>
-              <a:t>20/05/2023</a:t>
+              <a:t>04/01/2025</a:t>
             </a:fld>
             <a:endParaRPr lang="vi-VN"/>
           </a:p>
@@ -3151,24 +3149,7 @@
                 <a:latin typeface="微軟正黑體" pitchFamily="34" charset="-120"/>
                 <a:ea typeface="微軟正黑體" pitchFamily="34" charset="-120"/>
               </a:rPr>
-              <a:t>平</a:t>
-            </a:r>
-            <a:r>
-              <a:rPr lang="zh-CN" altLang="en-US" sz="7200" b="1" i="1" dirty="0">
-                <a:solidFill>
-                  <a:srgbClr val="660033"/>
-                </a:solidFill>
-                <a:effectLst>
-                  <a:outerShdw blurRad="38100" dist="38100" dir="2700000" algn="tl">
-                    <a:srgbClr val="000000">
-                      <a:alpha val="43137"/>
-                    </a:srgbClr>
-                  </a:outerShdw>
-                </a:effectLst>
-                <a:latin typeface="微軟正黑體" pitchFamily="34" charset="-120"/>
-                <a:ea typeface="微軟正黑體" pitchFamily="34" charset="-120"/>
-              </a:rPr>
-              <a:t>安</a:t>
+              <a:t>平安</a:t>
             </a:r>
             <a:endParaRPr lang="zh-TW" altLang="en-US" sz="7200" b="1" i="1" dirty="0">
               <a:solidFill>
@@ -3250,17 +3231,7 @@
                 <a:latin typeface="微軟正黑體" pitchFamily="34" charset="-120"/>
                 <a:ea typeface="微軟正黑體" pitchFamily="34" charset="-120"/>
               </a:rPr>
-              <a:t>耶</a:t>
-            </a:r>
-            <a:r>
-              <a:rPr lang="zh-TW" altLang="en-US" sz="6400" b="1" dirty="0">
-                <a:solidFill>
-                  <a:srgbClr val="660033"/>
-                </a:solidFill>
-                <a:latin typeface="微軟正黑體" pitchFamily="34" charset="-120"/>
-                <a:ea typeface="微軟正黑體" pitchFamily="34" charset="-120"/>
-              </a:rPr>
-              <a:t>和華向我們所懷的意念</a:t>
+              <a:t>耶和華向我們所懷的意念</a:t>
             </a:r>
             <a:endParaRPr lang="en-US" altLang="zh-TW" sz="6400" b="1" dirty="0">
               <a:solidFill>
@@ -3335,7 +3306,7 @@
                 <a:latin typeface="Microsoft JhengHei" panose="020B0604030504040204" pitchFamily="34" charset="-120"/>
                 <a:ea typeface="Microsoft JhengHei" panose="020B0604030504040204" pitchFamily="34" charset="-120"/>
               </a:rPr>
-              <a:t>正</a:t>
+              <a:t>正歌</a:t>
             </a:r>
             <a:r>
               <a:rPr lang="en-US" sz="3733" b="1" dirty="0">
@@ -3494,7 +3465,7 @@
                 <a:latin typeface="Microsoft JhengHei" panose="020B0604030504040204" pitchFamily="34" charset="-120"/>
                 <a:ea typeface="Microsoft JhengHei" panose="020B0604030504040204" pitchFamily="34" charset="-120"/>
               </a:rPr>
-              <a:t>正</a:t>
+              <a:t>正歌</a:t>
             </a:r>
             <a:r>
               <a:rPr lang="en-US" sz="3733" b="1" dirty="0">
@@ -3600,17 +3571,7 @@
                 <a:latin typeface="微軟正黑體" pitchFamily="34" charset="-120"/>
                 <a:ea typeface="微軟正黑體" pitchFamily="34" charset="-120"/>
               </a:rPr>
-              <a:t>祢就應允我</a:t>
-            </a:r>
-            <a:r>
-              <a:rPr lang="zh-TW" altLang="en-US" sz="6400" b="1" dirty="0">
-                <a:solidFill>
-                  <a:srgbClr val="660033"/>
-                </a:solidFill>
-                <a:latin typeface="微軟正黑體" pitchFamily="34" charset="-120"/>
-                <a:ea typeface="微軟正黑體" pitchFamily="34" charset="-120"/>
-              </a:rPr>
-              <a:t>們</a:t>
+              <a:t>祢就應允我們</a:t>
             </a:r>
             <a:endParaRPr lang="en-US" altLang="zh-TW" sz="6400" b="1" dirty="0">
               <a:solidFill>
@@ -3663,7 +3624,7 @@
                 <a:latin typeface="Microsoft JhengHei" panose="020B0604030504040204" pitchFamily="34" charset="-120"/>
                 <a:ea typeface="Microsoft JhengHei" panose="020B0604030504040204" pitchFamily="34" charset="-120"/>
               </a:rPr>
-              <a:t>副</a:t>
+              <a:t>副歌</a:t>
             </a:r>
             <a:r>
               <a:rPr lang="en-US" sz="3733" b="1" dirty="0">
@@ -3822,7 +3783,7 @@
                 <a:latin typeface="Microsoft JhengHei" panose="020B0604030504040204" pitchFamily="34" charset="-120"/>
                 <a:ea typeface="Microsoft JhengHei" panose="020B0604030504040204" pitchFamily="34" charset="-120"/>
               </a:rPr>
-              <a:t>副</a:t>
+              <a:t>副歌</a:t>
             </a:r>
             <a:r>
               <a:rPr lang="en-US" sz="3733" b="1" dirty="0">
@@ -3991,7 +3952,37 @@
                 <a:latin typeface="Microsoft JhengHei" panose="020B0604030504040204" pitchFamily="34" charset="-120"/>
                 <a:ea typeface="Microsoft JhengHei" panose="020B0604030504040204" pitchFamily="34" charset="-120"/>
               </a:rPr>
-              <a:t> )( x2 )</a:t>
+              <a:t> </a:t>
+            </a:r>
+            <a:r>
+              <a:rPr lang="en-US" sz="3733" b="1">
+                <a:solidFill>
+                  <a:srgbClr val="660033"/>
+                </a:solidFill>
+                <a:latin typeface="Microsoft JhengHei" panose="020B0604030504040204" pitchFamily="34" charset="-120"/>
+                <a:ea typeface="Microsoft JhengHei" panose="020B0604030504040204" pitchFamily="34" charset="-120"/>
+              </a:rPr>
+              <a:t>)( 2</a:t>
+            </a:r>
+            <a:r>
+              <a:rPr lang="zh-CN" altLang="en-US" sz="3733" b="1" dirty="0">
+                <a:solidFill>
+                  <a:srgbClr val="660033"/>
+                </a:solidFill>
+                <a:latin typeface="Microsoft JhengHei" panose="020B0604030504040204" pitchFamily="34" charset="-120"/>
+                <a:ea typeface="Microsoft JhengHei" panose="020B0604030504040204" pitchFamily="34" charset="-120"/>
+              </a:rPr>
+              <a:t>次</a:t>
+            </a:r>
+            <a:r>
+              <a:rPr lang="en-US" sz="3733" b="1" dirty="0">
+                <a:solidFill>
+                  <a:srgbClr val="660033"/>
+                </a:solidFill>
+                <a:latin typeface="Microsoft JhengHei" panose="020B0604030504040204" pitchFamily="34" charset="-120"/>
+                <a:ea typeface="Microsoft JhengHei" panose="020B0604030504040204" pitchFamily="34" charset="-120"/>
+              </a:rPr>
+              <a:t> )</a:t>
             </a:r>
             <a:endParaRPr lang="vi-VN" sz="3733" b="1" dirty="0">
               <a:solidFill>
